--- a/output/Bonus_Proposal_Presentation.pptx
+++ b/output/Bonus_Proposal_Presentation.pptx
@@ -5988,7 +5988,7 @@
                 </a:solidFill>
                 <a:latin typeface="Calibri"/>
               </a:rPr>
-              <a:t>  NB: 38, $52k W / $10.5k C (20%)</a:t>
+              <a:t>  NB: 38, $52k W / $10.5k C (20%, avg $1,380)</a:t>
             </a:r>
           </a:p>
         </p:txBody>
@@ -6026,7 +6026,7 @@
                 </a:solidFill>
                 <a:latin typeface="Calibri"/>
               </a:rPr>
-              <a:t>  RWR: 69, $96k W / $19.7k C (20%)</a:t>
+              <a:t>  RWR: 69, $96k W / $19.7k C (20%, avg $1,395)</a:t>
             </a:r>
           </a:p>
         </p:txBody>
@@ -6064,7 +6064,7 @@
                 </a:solidFill>
                 <a:latin typeface="Calibri"/>
               </a:rPr>
-              <a:t>  REN: 7, $6k W / $3.1k C (52%)</a:t>
+              <a:t>  REN: 7, $6k W / $3.1k C (52%, avg $852)</a:t>
             </a:r>
           </a:p>
         </p:txBody>
@@ -6096,13 +6096,13 @@
           <a:p>
             <a:pPr algn="l"/>
             <a:r>
-              <a:rPr sz="1000" b="0" i="0">
+              <a:rPr sz="1000" b="1" i="0">
                 <a:solidFill>
-                  <a:srgbClr val="101010"/>
+                  <a:srgbClr val="1F4E78"/>
                 </a:solidFill>
                 <a:latin typeface="Calibri"/>
               </a:rPr>
-              <a:t/>
+              <a:t>Per-policy BASE (tiered):</a:t>
             </a:r>
           </a:p>
         </p:txBody>
@@ -6134,13 +6134,13 @@
           <a:p>
             <a:pPr algn="l"/>
             <a:r>
-              <a:rPr sz="1000" b="1" i="0">
+              <a:rPr sz="1000" b="0" i="0">
                 <a:solidFill>
                   <a:srgbClr val="1F4E78"/>
                 </a:solidFill>
                 <a:latin typeface="Calibri"/>
               </a:rPr>
-              <a:t>Per-policy BASE:</a:t>
+              <a:t>  NB tier '$1,200-$1,799': 38 x $7 = $266</a:t>
             </a:r>
           </a:p>
         </p:txBody>
@@ -6178,7 +6178,7 @@
                 </a:solidFill>
                 <a:latin typeface="Calibri"/>
               </a:rPr>
-              <a:t>  NB = 38 x $7 = $266</a:t>
+              <a:t>  REN tier 'Under $1,200': 7 x $4 = $28</a:t>
             </a:r>
           </a:p>
         </p:txBody>
@@ -6216,7 +6216,7 @@
                 </a:solidFill>
                 <a:latin typeface="Calibri"/>
               </a:rPr>
-              <a:t>  REN = 7 x $5 = $35</a:t>
+              <a:t>  RWR tier '$1,200-$1,799': 69 x $3 = $207</a:t>
             </a:r>
           </a:p>
         </p:txBody>
@@ -6248,13 +6248,13 @@
           <a:p>
             <a:pPr algn="l"/>
             <a:r>
-              <a:rPr sz="1000" b="0" i="0">
+              <a:rPr sz="1000" b="1" i="0">
                 <a:solidFill>
                   <a:srgbClr val="1F4E78"/>
                 </a:solidFill>
                 <a:latin typeface="Calibri"/>
               </a:rPr>
-              <a:t>  RWR = 69 x $2 = $138</a:t>
+              <a:t>Collected incentive (&gt;$1,200 only):</a:t>
             </a:r>
           </a:p>
         </p:txBody>
@@ -6286,13 +6286,13 @@
           <a:p>
             <a:pPr algn="l"/>
             <a:r>
-              <a:rPr sz="1000" b="1" i="0">
+              <a:rPr sz="1000" b="0" i="0">
                 <a:solidFill>
                   <a:srgbClr val="1F4E78"/>
                 </a:solidFill>
                 <a:latin typeface="Calibri"/>
               </a:rPr>
-              <a:t>Collected incentive (&gt;$1,200 only):</a:t>
+              <a:t>  NB +$0/pol x 43% = $0</a:t>
             </a:r>
           </a:p>
         </p:txBody>
@@ -6330,7 +6330,7 @@
                 </a:solidFill>
                 <a:latin typeface="Calibri"/>
               </a:rPr>
-              <a:t>  NB +$0/pol x 43% = $0</a:t>
+              <a:t>  REN +$3/pol x 14% = $3</a:t>
             </a:r>
           </a:p>
         </p:txBody>
@@ -6368,7 +6368,7 @@
                 </a:solidFill>
                 <a:latin typeface="Calibri"/>
               </a:rPr>
-              <a:t>  REN +$3/pol x 14% = $3</a:t>
+              <a:t>  RWR +$0/pol x 44% = $0</a:t>
             </a:r>
           </a:p>
         </p:txBody>
@@ -6400,13 +6400,13 @@
           <a:p>
             <a:pPr algn="l"/>
             <a:r>
-              <a:rPr sz="1000" b="0" i="0">
+              <a:rPr sz="1000" b="1" i="0">
                 <a:solidFill>
                   <a:srgbClr val="1F4E78"/>
                 </a:solidFill>
                 <a:latin typeface="Calibri"/>
               </a:rPr>
-              <a:t>  RWR +$0/pol x 44% = $0</a:t>
+              <a:t>Retention (75% x $300) = $225</a:t>
             </a:r>
           </a:p>
         </p:txBody>
@@ -6444,7 +6444,7 @@
                 </a:solidFill>
                 <a:latin typeface="Calibri"/>
               </a:rPr>
-              <a:t>Retention (75% x $300) = $225</a:t>
+              <a:t>TARGET TOTAL = $729</a:t>
             </a:r>
           </a:p>
         </p:txBody>
@@ -6482,7 +6482,7 @@
                 </a:solidFill>
                 <a:latin typeface="Calibri"/>
               </a:rPr>
-              <a:t>TARGET TOTAL = $667</a:t>
+              <a:t>Apply gates:</a:t>
             </a:r>
           </a:p>
         </p:txBody>
@@ -6514,13 +6514,13 @@
           <a:p>
             <a:pPr algn="l"/>
             <a:r>
-              <a:rPr sz="1000" b="1" i="0">
+              <a:rPr sz="1000" b="0" i="0">
                 <a:solidFill>
-                  <a:srgbClr val="1F4E78"/>
+                  <a:srgbClr val="70AD47"/>
                 </a:solidFill>
                 <a:latin typeface="Calibri"/>
               </a:rPr>
-              <a:t>Apply gates:</a:t>
+              <a:t>  NB $52k vs $35k: PASS</a:t>
             </a:r>
           </a:p>
         </p:txBody>
@@ -6554,11 +6554,11 @@
             <a:r>
               <a:rPr sz="1000" b="0" i="0">
                 <a:solidFill>
-                  <a:srgbClr val="70AD47"/>
+                  <a:srgbClr val="C00000"/>
                 </a:solidFill>
                 <a:latin typeface="Calibri"/>
               </a:rPr>
-              <a:t>  NB $52k vs $35k: PASS</a:t>
+              <a:t>  REN $6k vs $20k: FAIL</a:t>
             </a:r>
           </a:p>
         </p:txBody>
@@ -6596,7 +6596,7 @@
                 </a:solidFill>
                 <a:latin typeface="Calibri"/>
               </a:rPr>
-              <a:t>  REN $6k vs $20k: FAIL</a:t>
+              <a:t>  RWR (both): FAIL</a:t>
             </a:r>
           </a:p>
         </p:txBody>
@@ -6628,44 +6628,6 @@
           <a:p>
             <a:pPr algn="l"/>
             <a:r>
-              <a:rPr sz="1000" b="0" i="0">
-                <a:solidFill>
-                  <a:srgbClr val="C00000"/>
-                </a:solidFill>
-                <a:latin typeface="Calibri"/>
-              </a:rPr>
-              <a:t>  RWR (both): FAIL</a:t>
-            </a:r>
-          </a:p>
-        </p:txBody>
-      </p:sp>
-      <p:sp>
-        <p:nvSpPr>
-          <p:cNvPr id="30" name="TextBox 29"/>
-          <p:cNvSpPr txBox="1"/>
-          <p:nvPr/>
-        </p:nvSpPr>
-        <p:spPr>
-          <a:xfrm>
-            <a:off x="365760" y="5152644"/>
-            <a:ext cx="3520440" cy="196596"/>
-          </a:xfrm>
-          <a:prstGeom prst="rect">
-            <a:avLst/>
-          </a:prstGeom>
-          <a:noFill/>
-          <a:ln>
-            <a:noFill/>
-          </a:ln>
-        </p:spPr>
-        <p:txBody>
-          <a:bodyPr wrap="square" lIns="73152" rIns="73152" tIns="36576" bIns="36576" anchor="t">
-            <a:spAutoFit/>
-          </a:bodyPr>
-          <a:lstStyle/>
-          <a:p>
-            <a:pPr algn="l"/>
-            <a:r>
               <a:rPr sz="1000" b="1" i="0">
                 <a:solidFill>
                   <a:srgbClr val="1F4E78"/>
@@ -6679,7 +6641,7 @@
       </p:sp>
       <p:sp>
         <p:nvSpPr>
-          <p:cNvPr id="31" name="Rectangle 30"/>
+          <p:cNvPr id="30" name="Rectangle 29"/>
           <p:cNvSpPr/>
           <p:nvPr/>
         </p:nvSpPr>
@@ -6723,7 +6685,7 @@
       </p:sp>
       <p:sp>
         <p:nvSpPr>
-          <p:cNvPr id="32" name="TextBox 31"/>
+          <p:cNvPr id="31" name="TextBox 30"/>
           <p:cNvSpPr txBox="1"/>
           <p:nvPr/>
         </p:nvSpPr>
@@ -6761,7 +6723,7 @@
       </p:sp>
       <p:sp>
         <p:nvSpPr>
-          <p:cNvPr id="33" name="Rectangle 32"/>
+          <p:cNvPr id="32" name="Rectangle 31"/>
           <p:cNvSpPr/>
           <p:nvPr/>
         </p:nvSpPr>
@@ -6805,7 +6767,7 @@
       </p:sp>
       <p:sp>
         <p:nvSpPr>
-          <p:cNvPr id="34" name="TextBox 33"/>
+          <p:cNvPr id="33" name="TextBox 32"/>
           <p:cNvSpPr txBox="1"/>
           <p:nvPr/>
         </p:nvSpPr>
@@ -6843,7 +6805,7 @@
       </p:sp>
       <p:sp>
         <p:nvSpPr>
-          <p:cNvPr id="35" name="TextBox 34"/>
+          <p:cNvPr id="34" name="TextBox 33"/>
           <p:cNvSpPr txBox="1"/>
           <p:nvPr/>
         </p:nvSpPr>
@@ -6874,14 +6836,14 @@
                 </a:solidFill>
                 <a:latin typeface="Calibri"/>
               </a:rPr>
-              <a:t>  NB: 38, $52k W / $10.5k C (20%)</a:t>
+              <a:t>  NB: 38, $52k W / $10.5k C (20%, avg $1,380)</a:t>
             </a:r>
           </a:p>
         </p:txBody>
       </p:sp>
       <p:sp>
         <p:nvSpPr>
-          <p:cNvPr id="36" name="TextBox 35"/>
+          <p:cNvPr id="35" name="TextBox 34"/>
           <p:cNvSpPr txBox="1"/>
           <p:nvPr/>
         </p:nvSpPr>
@@ -6912,14 +6874,14 @@
                 </a:solidFill>
                 <a:latin typeface="Calibri"/>
               </a:rPr>
-              <a:t>  RWR: 35, $48k W / $9.9k C (20%)</a:t>
+              <a:t>  RWR: 35, $48k W / $9.9k C (20%, avg $1,375)</a:t>
             </a:r>
           </a:p>
         </p:txBody>
       </p:sp>
       <p:sp>
         <p:nvSpPr>
-          <p:cNvPr id="37" name="TextBox 36"/>
+          <p:cNvPr id="36" name="TextBox 35"/>
           <p:cNvSpPr txBox="1"/>
           <p:nvPr/>
         </p:nvSpPr>
@@ -6950,14 +6912,14 @@
                 </a:solidFill>
                 <a:latin typeface="Calibri"/>
               </a:rPr>
-              <a:t>  REN: 41, $54k W / $12.9k C (24%)</a:t>
+              <a:t>  REN: 41, $54k W / $12.9k C (24%, avg $1,319)</a:t>
             </a:r>
           </a:p>
         </p:txBody>
       </p:sp>
       <p:sp>
         <p:nvSpPr>
-          <p:cNvPr id="38" name="TextBox 37"/>
+          <p:cNvPr id="37" name="TextBox 36"/>
           <p:cNvSpPr txBox="1"/>
           <p:nvPr/>
         </p:nvSpPr>
@@ -6982,20 +6944,20 @@
           <a:p>
             <a:pPr algn="l"/>
             <a:r>
-              <a:rPr sz="1000" b="0" i="0">
+              <a:rPr sz="1000" b="1" i="0">
                 <a:solidFill>
-                  <a:srgbClr val="101010"/>
+                  <a:srgbClr val="2E75B6"/>
                 </a:solidFill>
                 <a:latin typeface="Calibri"/>
               </a:rPr>
-              <a:t/>
+              <a:t>Per-policy BASE (tiered):</a:t>
             </a:r>
           </a:p>
         </p:txBody>
       </p:sp>
       <p:sp>
         <p:nvSpPr>
-          <p:cNvPr id="39" name="TextBox 38"/>
+          <p:cNvPr id="38" name="TextBox 37"/>
           <p:cNvSpPr txBox="1"/>
           <p:nvPr/>
         </p:nvSpPr>
@@ -7020,20 +6982,20 @@
           <a:p>
             <a:pPr algn="l"/>
             <a:r>
-              <a:rPr sz="1000" b="1" i="0">
+              <a:rPr sz="1000" b="0" i="0">
                 <a:solidFill>
-                  <a:srgbClr val="2E75B6"/>
+                  <a:srgbClr val="1F4E78"/>
                 </a:solidFill>
                 <a:latin typeface="Calibri"/>
               </a:rPr>
-              <a:t>Per-policy BASE:</a:t>
+              <a:t>  NB tier '$1,200-$1,799': 38 x $7 = $266</a:t>
             </a:r>
           </a:p>
         </p:txBody>
       </p:sp>
       <p:sp>
         <p:nvSpPr>
-          <p:cNvPr id="40" name="TextBox 39"/>
+          <p:cNvPr id="39" name="TextBox 38"/>
           <p:cNvSpPr txBox="1"/>
           <p:nvPr/>
         </p:nvSpPr>
@@ -7064,14 +7026,14 @@
                 </a:solidFill>
                 <a:latin typeface="Calibri"/>
               </a:rPr>
-              <a:t>  NB = 38 x $7 = $266</a:t>
+              <a:t>  REN tier '$1,200-$1,799': 41 x $6 = $246</a:t>
             </a:r>
           </a:p>
         </p:txBody>
       </p:sp>
       <p:sp>
         <p:nvSpPr>
-          <p:cNvPr id="41" name="TextBox 40"/>
+          <p:cNvPr id="40" name="TextBox 39"/>
           <p:cNvSpPr txBox="1"/>
           <p:nvPr/>
         </p:nvSpPr>
@@ -7102,58 +7064,20 @@
                 </a:solidFill>
                 <a:latin typeface="Calibri"/>
               </a:rPr>
-              <a:t>  REN = 41 x $5 = $205</a:t>
+              <a:t>  RWR tier '$1,200-$1,799': 35 x $3 = $105</a:t>
             </a:r>
           </a:p>
         </p:txBody>
       </p:sp>
       <p:sp>
         <p:nvSpPr>
-          <p:cNvPr id="42" name="TextBox 41"/>
+          <p:cNvPr id="41" name="TextBox 40"/>
           <p:cNvSpPr txBox="1"/>
           <p:nvPr/>
         </p:nvSpPr>
         <p:spPr>
           <a:xfrm>
             <a:off x="4315968" y="2990088"/>
-            <a:ext cx="3520440" cy="196596"/>
-          </a:xfrm>
-          <a:prstGeom prst="rect">
-            <a:avLst/>
-          </a:prstGeom>
-          <a:noFill/>
-          <a:ln>
-            <a:noFill/>
-          </a:ln>
-        </p:spPr>
-        <p:txBody>
-          <a:bodyPr wrap="square" lIns="73152" rIns="73152" tIns="36576" bIns="36576" anchor="t">
-            <a:spAutoFit/>
-          </a:bodyPr>
-          <a:lstStyle/>
-          <a:p>
-            <a:pPr algn="l"/>
-            <a:r>
-              <a:rPr sz="1000" b="0" i="0">
-                <a:solidFill>
-                  <a:srgbClr val="1F4E78"/>
-                </a:solidFill>
-                <a:latin typeface="Calibri"/>
-              </a:rPr>
-              <a:t>  RWR = 35 x $2 = $70</a:t>
-            </a:r>
-          </a:p>
-        </p:txBody>
-      </p:sp>
-      <p:sp>
-        <p:nvSpPr>
-          <p:cNvPr id="43" name="TextBox 42"/>
-          <p:cNvSpPr txBox="1"/>
-          <p:nvPr/>
-        </p:nvSpPr>
-        <p:spPr>
-          <a:xfrm>
-            <a:off x="4315968" y="3186684"/>
             <a:ext cx="3520440" cy="196596"/>
           </a:xfrm>
           <a:prstGeom prst="rect">
@@ -7185,13 +7109,13 @@
       </p:sp>
       <p:sp>
         <p:nvSpPr>
-          <p:cNvPr id="44" name="TextBox 43"/>
+          <p:cNvPr id="42" name="TextBox 41"/>
           <p:cNvSpPr txBox="1"/>
           <p:nvPr/>
         </p:nvSpPr>
         <p:spPr>
           <a:xfrm>
-            <a:off x="4315968" y="3383280"/>
+            <a:off x="4315968" y="3186684"/>
             <a:ext cx="3520440" cy="196596"/>
           </a:xfrm>
           <a:prstGeom prst="rect">
@@ -7223,13 +7147,13 @@
       </p:sp>
       <p:sp>
         <p:nvSpPr>
-          <p:cNvPr id="45" name="TextBox 44"/>
+          <p:cNvPr id="43" name="TextBox 42"/>
           <p:cNvSpPr txBox="1"/>
           <p:nvPr/>
         </p:nvSpPr>
         <p:spPr>
           <a:xfrm>
-            <a:off x="4315968" y="3579876"/>
+            <a:off x="4315968" y="3383280"/>
             <a:ext cx="3520440" cy="196596"/>
           </a:xfrm>
           <a:prstGeom prst="rect">
@@ -7261,13 +7185,13 @@
       </p:sp>
       <p:sp>
         <p:nvSpPr>
-          <p:cNvPr id="46" name="TextBox 45"/>
+          <p:cNvPr id="44" name="TextBox 43"/>
           <p:cNvSpPr txBox="1"/>
           <p:nvPr/>
         </p:nvSpPr>
         <p:spPr>
           <a:xfrm>
-            <a:off x="4315968" y="3776472"/>
+            <a:off x="4315968" y="3579876"/>
             <a:ext cx="3520440" cy="196596"/>
           </a:xfrm>
           <a:prstGeom prst="rect">
@@ -7299,13 +7223,13 @@
       </p:sp>
       <p:sp>
         <p:nvSpPr>
-          <p:cNvPr id="47" name="TextBox 46"/>
+          <p:cNvPr id="45" name="TextBox 44"/>
           <p:cNvSpPr txBox="1"/>
           <p:nvPr/>
         </p:nvSpPr>
         <p:spPr>
           <a:xfrm>
-            <a:off x="4315968" y="3973068"/>
+            <a:off x="4315968" y="3776472"/>
             <a:ext cx="3520440" cy="196596"/>
           </a:xfrm>
           <a:prstGeom prst="rect">
@@ -7337,13 +7261,13 @@
       </p:sp>
       <p:sp>
         <p:nvSpPr>
-          <p:cNvPr id="48" name="TextBox 47"/>
+          <p:cNvPr id="46" name="TextBox 45"/>
           <p:cNvSpPr txBox="1"/>
           <p:nvPr/>
         </p:nvSpPr>
         <p:spPr>
           <a:xfrm>
-            <a:off x="4315968" y="4169664"/>
+            <a:off x="4315968" y="3973068"/>
             <a:ext cx="3520440" cy="196596"/>
           </a:xfrm>
           <a:prstGeom prst="rect">
@@ -7368,20 +7292,20 @@
                 </a:solidFill>
                 <a:latin typeface="Calibri"/>
               </a:rPr>
-              <a:t>TARGET TOTAL = $766</a:t>
+              <a:t>TARGET TOTAL = $842</a:t>
             </a:r>
           </a:p>
         </p:txBody>
       </p:sp>
       <p:sp>
         <p:nvSpPr>
-          <p:cNvPr id="49" name="TextBox 48"/>
+          <p:cNvPr id="47" name="TextBox 46"/>
           <p:cNvSpPr txBox="1"/>
           <p:nvPr/>
         </p:nvSpPr>
         <p:spPr>
           <a:xfrm>
-            <a:off x="4315968" y="4366260"/>
+            <a:off x="4315968" y="4169664"/>
             <a:ext cx="3520440" cy="196596"/>
           </a:xfrm>
           <a:prstGeom prst="rect">
@@ -7413,13 +7337,13 @@
       </p:sp>
       <p:sp>
         <p:nvSpPr>
-          <p:cNvPr id="50" name="TextBox 49"/>
+          <p:cNvPr id="48" name="TextBox 47"/>
           <p:cNvSpPr txBox="1"/>
           <p:nvPr/>
         </p:nvSpPr>
         <p:spPr>
           <a:xfrm>
-            <a:off x="4315968" y="4562856"/>
+            <a:off x="4315968" y="4366260"/>
             <a:ext cx="3520440" cy="196596"/>
           </a:xfrm>
           <a:prstGeom prst="rect">
@@ -7451,13 +7375,13 @@
       </p:sp>
       <p:sp>
         <p:nvSpPr>
-          <p:cNvPr id="51" name="TextBox 50"/>
+          <p:cNvPr id="49" name="TextBox 48"/>
           <p:cNvSpPr txBox="1"/>
           <p:nvPr/>
         </p:nvSpPr>
         <p:spPr>
           <a:xfrm>
-            <a:off x="4315968" y="4759452"/>
+            <a:off x="4315968" y="4562856"/>
             <a:ext cx="3520440" cy="196596"/>
           </a:xfrm>
           <a:prstGeom prst="rect">
@@ -7489,13 +7413,13 @@
       </p:sp>
       <p:sp>
         <p:nvSpPr>
-          <p:cNvPr id="52" name="TextBox 51"/>
+          <p:cNvPr id="50" name="TextBox 49"/>
           <p:cNvSpPr txBox="1"/>
           <p:nvPr/>
         </p:nvSpPr>
         <p:spPr>
           <a:xfrm>
-            <a:off x="4315968" y="4956048"/>
+            <a:off x="4315968" y="4759452"/>
             <a:ext cx="3520440" cy="196596"/>
           </a:xfrm>
           <a:prstGeom prst="rect">
@@ -7527,13 +7451,13 @@
       </p:sp>
       <p:sp>
         <p:nvSpPr>
-          <p:cNvPr id="53" name="TextBox 52"/>
+          <p:cNvPr id="51" name="TextBox 50"/>
           <p:cNvSpPr txBox="1"/>
           <p:nvPr/>
         </p:nvSpPr>
         <p:spPr>
           <a:xfrm>
-            <a:off x="4315968" y="5152644"/>
+            <a:off x="4315968" y="4956048"/>
             <a:ext cx="3520440" cy="196596"/>
           </a:xfrm>
           <a:prstGeom prst="rect">
@@ -7558,14 +7482,14 @@
                 </a:solidFill>
                 <a:latin typeface="Calibri"/>
               </a:rPr>
-              <a:t>PAID = $766</a:t>
+              <a:t>PAID = $842</a:t>
             </a:r>
           </a:p>
         </p:txBody>
       </p:sp>
       <p:sp>
         <p:nvSpPr>
-          <p:cNvPr id="54" name="Rectangle 53"/>
+          <p:cNvPr id="52" name="Rectangle 51"/>
           <p:cNvSpPr/>
           <p:nvPr/>
         </p:nvSpPr>
@@ -7609,7 +7533,7 @@
       </p:sp>
       <p:sp>
         <p:nvSpPr>
-          <p:cNvPr id="55" name="TextBox 54"/>
+          <p:cNvPr id="53" name="TextBox 52"/>
           <p:cNvSpPr txBox="1"/>
           <p:nvPr/>
         </p:nvSpPr>
@@ -7647,7 +7571,7 @@
       </p:sp>
       <p:sp>
         <p:nvSpPr>
-          <p:cNvPr id="56" name="Rectangle 55"/>
+          <p:cNvPr id="54" name="Rectangle 53"/>
           <p:cNvSpPr/>
           <p:nvPr/>
         </p:nvSpPr>
@@ -7691,7 +7615,7 @@
       </p:sp>
       <p:sp>
         <p:nvSpPr>
-          <p:cNvPr id="57" name="TextBox 56"/>
+          <p:cNvPr id="55" name="TextBox 54"/>
           <p:cNvSpPr txBox="1"/>
           <p:nvPr/>
         </p:nvSpPr>
@@ -7729,7 +7653,7 @@
       </p:sp>
       <p:sp>
         <p:nvSpPr>
-          <p:cNvPr id="58" name="TextBox 57"/>
+          <p:cNvPr id="56" name="TextBox 55"/>
           <p:cNvSpPr txBox="1"/>
           <p:nvPr/>
         </p:nvSpPr>
@@ -7760,14 +7684,14 @@
                 </a:solidFill>
                 <a:latin typeface="Calibri"/>
               </a:rPr>
-              <a:t>  NB: 38, $52k W / $10.5k C (20%)</a:t>
+              <a:t>  NB: 38, $52k W / $10.5k C (20%, avg $1,380)</a:t>
             </a:r>
           </a:p>
         </p:txBody>
       </p:sp>
       <p:sp>
         <p:nvSpPr>
-          <p:cNvPr id="59" name="TextBox 58"/>
+          <p:cNvPr id="57" name="TextBox 56"/>
           <p:cNvSpPr txBox="1"/>
           <p:nvPr/>
         </p:nvSpPr>
@@ -7798,14 +7722,14 @@
                 </a:solidFill>
                 <a:latin typeface="Calibri"/>
               </a:rPr>
-              <a:t>  RWR: 7, $6k W / $3.1k C (52%)</a:t>
+              <a:t>  RWR: 7, $6k W / $3.1k C (52%, avg $852)</a:t>
             </a:r>
           </a:p>
         </p:txBody>
       </p:sp>
       <p:sp>
         <p:nvSpPr>
-          <p:cNvPr id="60" name="TextBox 59"/>
+          <p:cNvPr id="58" name="TextBox 57"/>
           <p:cNvSpPr txBox="1"/>
           <p:nvPr/>
         </p:nvSpPr>
@@ -7836,14 +7760,14 @@
                 </a:solidFill>
                 <a:latin typeface="Calibri"/>
               </a:rPr>
-              <a:t>  REN: 69, $96k W / $19.7k C (20%)</a:t>
+              <a:t>  REN: 69, $96k W / $19.7k C (20%, avg $1,395)</a:t>
             </a:r>
           </a:p>
         </p:txBody>
       </p:sp>
       <p:sp>
         <p:nvSpPr>
-          <p:cNvPr id="61" name="TextBox 60"/>
+          <p:cNvPr id="59" name="TextBox 58"/>
           <p:cNvSpPr txBox="1"/>
           <p:nvPr/>
         </p:nvSpPr>
@@ -7868,20 +7792,20 @@
           <a:p>
             <a:pPr algn="l"/>
             <a:r>
-              <a:rPr sz="1000" b="0" i="0">
+              <a:rPr sz="1000" b="1" i="0">
                 <a:solidFill>
-                  <a:srgbClr val="101010"/>
+                  <a:srgbClr val="BF9000"/>
                 </a:solidFill>
                 <a:latin typeface="Calibri"/>
               </a:rPr>
-              <a:t/>
+              <a:t>Per-policy BASE (tiered):</a:t>
             </a:r>
           </a:p>
         </p:txBody>
       </p:sp>
       <p:sp>
         <p:nvSpPr>
-          <p:cNvPr id="62" name="TextBox 61"/>
+          <p:cNvPr id="60" name="TextBox 59"/>
           <p:cNvSpPr txBox="1"/>
           <p:nvPr/>
         </p:nvSpPr>
@@ -7906,20 +7830,20 @@
           <a:p>
             <a:pPr algn="l"/>
             <a:r>
-              <a:rPr sz="1000" b="1" i="0">
+              <a:rPr sz="1000" b="0" i="0">
                 <a:solidFill>
-                  <a:srgbClr val="BF9000"/>
+                  <a:srgbClr val="1F4E78"/>
                 </a:solidFill>
                 <a:latin typeface="Calibri"/>
               </a:rPr>
-              <a:t>Per-policy BASE:</a:t>
+              <a:t>  NB tier '$1,200-$1,799': 38 x $7 = $266</a:t>
             </a:r>
           </a:p>
         </p:txBody>
       </p:sp>
       <p:sp>
         <p:nvSpPr>
-          <p:cNvPr id="63" name="TextBox 62"/>
+          <p:cNvPr id="61" name="TextBox 60"/>
           <p:cNvSpPr txBox="1"/>
           <p:nvPr/>
         </p:nvSpPr>
@@ -7950,14 +7874,14 @@
                 </a:solidFill>
                 <a:latin typeface="Calibri"/>
               </a:rPr>
-              <a:t>  NB = 38 x $7 = $266</a:t>
+              <a:t>  REN tier '$1,200-$1,799': 69 x $6 = $414</a:t>
             </a:r>
           </a:p>
         </p:txBody>
       </p:sp>
       <p:sp>
         <p:nvSpPr>
-          <p:cNvPr id="64" name="TextBox 63"/>
+          <p:cNvPr id="62" name="TextBox 61"/>
           <p:cNvSpPr txBox="1"/>
           <p:nvPr/>
         </p:nvSpPr>
@@ -7988,58 +7912,20 @@
                 </a:solidFill>
                 <a:latin typeface="Calibri"/>
               </a:rPr>
-              <a:t>  REN = 69 x $5 = $345</a:t>
+              <a:t>  RWR tier 'Under $1,200': 7 x $2 = $14</a:t>
             </a:r>
           </a:p>
         </p:txBody>
       </p:sp>
       <p:sp>
         <p:nvSpPr>
-          <p:cNvPr id="65" name="TextBox 64"/>
+          <p:cNvPr id="63" name="TextBox 62"/>
           <p:cNvSpPr txBox="1"/>
           <p:nvPr/>
         </p:nvSpPr>
         <p:spPr>
           <a:xfrm>
             <a:off x="8266176" y="2990088"/>
-            <a:ext cx="3520440" cy="196596"/>
-          </a:xfrm>
-          <a:prstGeom prst="rect">
-            <a:avLst/>
-          </a:prstGeom>
-          <a:noFill/>
-          <a:ln>
-            <a:noFill/>
-          </a:ln>
-        </p:spPr>
-        <p:txBody>
-          <a:bodyPr wrap="square" lIns="73152" rIns="73152" tIns="36576" bIns="36576" anchor="t">
-            <a:spAutoFit/>
-          </a:bodyPr>
-          <a:lstStyle/>
-          <a:p>
-            <a:pPr algn="l"/>
-            <a:r>
-              <a:rPr sz="1000" b="0" i="0">
-                <a:solidFill>
-                  <a:srgbClr val="1F4E78"/>
-                </a:solidFill>
-                <a:latin typeface="Calibri"/>
-              </a:rPr>
-              <a:t>  RWR = 7 x $2 = $14</a:t>
-            </a:r>
-          </a:p>
-        </p:txBody>
-      </p:sp>
-      <p:sp>
-        <p:nvSpPr>
-          <p:cNvPr id="66" name="TextBox 65"/>
-          <p:cNvSpPr txBox="1"/>
-          <p:nvPr/>
-        </p:nvSpPr>
-        <p:spPr>
-          <a:xfrm>
-            <a:off x="8266176" y="3186684"/>
             <a:ext cx="3520440" cy="196596"/>
           </a:xfrm>
           <a:prstGeom prst="rect">
@@ -8071,13 +7957,13 @@
       </p:sp>
       <p:sp>
         <p:nvSpPr>
-          <p:cNvPr id="67" name="TextBox 66"/>
+          <p:cNvPr id="64" name="TextBox 63"/>
           <p:cNvSpPr txBox="1"/>
           <p:nvPr/>
         </p:nvSpPr>
         <p:spPr>
           <a:xfrm>
-            <a:off x="8266176" y="3383280"/>
+            <a:off x="8266176" y="3186684"/>
             <a:ext cx="3520440" cy="196596"/>
           </a:xfrm>
           <a:prstGeom prst="rect">
@@ -8109,13 +7995,13 @@
       </p:sp>
       <p:sp>
         <p:nvSpPr>
-          <p:cNvPr id="68" name="TextBox 67"/>
+          <p:cNvPr id="65" name="TextBox 64"/>
           <p:cNvSpPr txBox="1"/>
           <p:nvPr/>
         </p:nvSpPr>
         <p:spPr>
           <a:xfrm>
-            <a:off x="8266176" y="3579876"/>
+            <a:off x="8266176" y="3383280"/>
             <a:ext cx="3520440" cy="196596"/>
           </a:xfrm>
           <a:prstGeom prst="rect">
@@ -8147,13 +8033,13 @@
       </p:sp>
       <p:sp>
         <p:nvSpPr>
-          <p:cNvPr id="69" name="TextBox 68"/>
+          <p:cNvPr id="66" name="TextBox 65"/>
           <p:cNvSpPr txBox="1"/>
           <p:nvPr/>
         </p:nvSpPr>
         <p:spPr>
           <a:xfrm>
-            <a:off x="8266176" y="3776472"/>
+            <a:off x="8266176" y="3579876"/>
             <a:ext cx="3520440" cy="196596"/>
           </a:xfrm>
           <a:prstGeom prst="rect">
@@ -8185,13 +8071,13 @@
       </p:sp>
       <p:sp>
         <p:nvSpPr>
-          <p:cNvPr id="70" name="TextBox 69"/>
+          <p:cNvPr id="67" name="TextBox 66"/>
           <p:cNvSpPr txBox="1"/>
           <p:nvPr/>
         </p:nvSpPr>
         <p:spPr>
           <a:xfrm>
-            <a:off x="8266176" y="3973068"/>
+            <a:off x="8266176" y="3776472"/>
             <a:ext cx="3520440" cy="196596"/>
           </a:xfrm>
           <a:prstGeom prst="rect">
@@ -8223,13 +8109,13 @@
       </p:sp>
       <p:sp>
         <p:nvSpPr>
-          <p:cNvPr id="71" name="TextBox 70"/>
+          <p:cNvPr id="68" name="TextBox 67"/>
           <p:cNvSpPr txBox="1"/>
           <p:nvPr/>
         </p:nvSpPr>
         <p:spPr>
           <a:xfrm>
-            <a:off x="8266176" y="4169664"/>
+            <a:off x="8266176" y="3973068"/>
             <a:ext cx="3520440" cy="196596"/>
           </a:xfrm>
           <a:prstGeom prst="rect">
@@ -8254,20 +8140,20 @@
                 </a:solidFill>
                 <a:latin typeface="Calibri"/>
               </a:rPr>
-              <a:t>TARGET TOTAL = $853</a:t>
+              <a:t>TARGET TOTAL = $922</a:t>
             </a:r>
           </a:p>
         </p:txBody>
       </p:sp>
       <p:sp>
         <p:nvSpPr>
-          <p:cNvPr id="72" name="TextBox 71"/>
+          <p:cNvPr id="69" name="TextBox 68"/>
           <p:cNvSpPr txBox="1"/>
           <p:nvPr/>
         </p:nvSpPr>
         <p:spPr>
           <a:xfrm>
-            <a:off x="8266176" y="4366260"/>
+            <a:off x="8266176" y="4169664"/>
             <a:ext cx="3520440" cy="196596"/>
           </a:xfrm>
           <a:prstGeom prst="rect">
@@ -8299,13 +8185,13 @@
       </p:sp>
       <p:sp>
         <p:nvSpPr>
-          <p:cNvPr id="73" name="TextBox 72"/>
+          <p:cNvPr id="70" name="TextBox 69"/>
           <p:cNvSpPr txBox="1"/>
           <p:nvPr/>
         </p:nvSpPr>
         <p:spPr>
           <a:xfrm>
-            <a:off x="8266176" y="4562856"/>
+            <a:off x="8266176" y="4366260"/>
             <a:ext cx="3520440" cy="196596"/>
           </a:xfrm>
           <a:prstGeom prst="rect">
@@ -8337,13 +8223,13 @@
       </p:sp>
       <p:sp>
         <p:nvSpPr>
-          <p:cNvPr id="74" name="TextBox 73"/>
+          <p:cNvPr id="71" name="TextBox 70"/>
           <p:cNvSpPr txBox="1"/>
           <p:nvPr/>
         </p:nvSpPr>
         <p:spPr>
           <a:xfrm>
-            <a:off x="8266176" y="4759452"/>
+            <a:off x="8266176" y="4562856"/>
             <a:ext cx="3520440" cy="196596"/>
           </a:xfrm>
           <a:prstGeom prst="rect">
@@ -8375,13 +8261,13 @@
       </p:sp>
       <p:sp>
         <p:nvSpPr>
-          <p:cNvPr id="75" name="TextBox 74"/>
+          <p:cNvPr id="72" name="TextBox 71"/>
           <p:cNvSpPr txBox="1"/>
           <p:nvPr/>
         </p:nvSpPr>
         <p:spPr>
           <a:xfrm>
-            <a:off x="8266176" y="4956048"/>
+            <a:off x="8266176" y="4759452"/>
             <a:ext cx="3520440" cy="196596"/>
           </a:xfrm>
           <a:prstGeom prst="rect">
@@ -8413,13 +8299,13 @@
       </p:sp>
       <p:sp>
         <p:nvSpPr>
-          <p:cNvPr id="76" name="TextBox 75"/>
+          <p:cNvPr id="73" name="TextBox 72"/>
           <p:cNvSpPr txBox="1"/>
           <p:nvPr/>
         </p:nvSpPr>
         <p:spPr>
           <a:xfrm>
-            <a:off x="8266176" y="5152644"/>
+            <a:off x="8266176" y="4956048"/>
             <a:ext cx="3520440" cy="196596"/>
           </a:xfrm>
           <a:prstGeom prst="rect">
@@ -8444,7 +8330,7 @@
                 </a:solidFill>
                 <a:latin typeface="Calibri"/>
               </a:rPr>
-              <a:t>PAID = $853</a:t>
+              <a:t>PAID = $922</a:t>
             </a:r>
           </a:p>
         </p:txBody>
@@ -39633,7 +39519,7 @@
                           </a:solidFill>
                           <a:latin typeface="Calibri"/>
                         </a:rPr>
-                        <a:t>$11,462</a:t>
+                        <a:t>$11,842</a:t>
                       </a:r>
                     </a:p>
                   </a:txBody>
@@ -39656,7 +39542,7 @@
                           </a:solidFill>
                           <a:latin typeface="Calibri"/>
                         </a:rPr>
-                        <a:t>$12,664</a:t>
+                        <a:t>$13,079</a:t>
                       </a:r>
                     </a:p>
                   </a:txBody>
@@ -39679,7 +39565,7 @@
                           </a:solidFill>
                           <a:latin typeface="Calibri"/>
                         </a:rPr>
-                        <a:t>$13,589</a:t>
+                        <a:t>$13,730</a:t>
                       </a:r>
                     </a:p>
                   </a:txBody>
@@ -39750,7 +39636,7 @@
                           </a:solidFill>
                           <a:latin typeface="Calibri"/>
                         </a:rPr>
-                        <a:t>$7,297</a:t>
+                        <a:t>$7,343</a:t>
                       </a:r>
                     </a:p>
                   </a:txBody>
@@ -39773,7 +39659,7 @@
                           </a:solidFill>
                           <a:latin typeface="Calibri"/>
                         </a:rPr>
-                        <a:t>$9,653</a:t>
+                        <a:t>$10,095</a:t>
                       </a:r>
                     </a:p>
                   </a:txBody>
@@ -39796,7 +39682,7 @@
                           </a:solidFill>
                           <a:latin typeface="Calibri"/>
                         </a:rPr>
-                        <a:t>$11,322</a:t>
+                        <a:t>$11,600</a:t>
                       </a:r>
                     </a:p>
                   </a:txBody>
@@ -46673,7 +46559,7 @@
                 </a:solidFill>
                 <a:latin typeface="Calibri"/>
               </a:rPr>
-              <a:t>1. PER-POLICY BASE (flat, no tiers)</a:t>
+              <a:t>1. PER-POLICY BASE (TIERED by written premium)</a:t>
             </a:r>
           </a:p>
         </p:txBody>
@@ -46688,7 +46574,7 @@
         </p:nvGraphicFramePr>
         <p:xfrm>
           <a:off x="365760" y="1280160"/>
-          <a:ext cx="5669280" cy="1280160"/>
+          <a:ext cx="5669280" cy="1755648"/>
         </p:xfrm>
         <a:graphic>
           <a:graphicData uri="http://schemas.openxmlformats.org/drawingml/2006/table">
@@ -46698,10 +46584,11 @@
               </a:tblPr>
               <a:tblGrid>
                 <a:gridCol w="1828800"/>
+                <a:gridCol w="1554480"/>
+                <a:gridCol w="914400"/>
                 <a:gridCol w="1371600"/>
-                <a:gridCol w="2468880"/>
               </a:tblGrid>
-              <a:tr h="320040">
+              <a:tr h="292608">
                 <a:tc>
                   <a:txBody>
                     <a:bodyPr lIns="45720" rIns="45720" tIns="18288" bIns="18288" wrap="square" anchor="ctr"/>
@@ -46715,7 +46602,7 @@
                           </a:solidFill>
                           <a:latin typeface="Calibri"/>
                         </a:rPr>
-                        <a:t>Policy Type</a:t>
+                        <a:t>Premium tier</a:t>
                       </a:r>
                     </a:p>
                   </a:txBody>
@@ -46738,7 +46625,7 @@
                           </a:solidFill>
                           <a:latin typeface="Calibri"/>
                         </a:rPr>
-                        <a:t>Base per policy</a:t>
+                        <a:t>NB</a:t>
                       </a:r>
                     </a:p>
                   </a:txBody>
@@ -46761,7 +46648,7 @@
                           </a:solidFill>
                           <a:latin typeface="Calibri"/>
                         </a:rPr>
-                        <a:t>What it means</a:t>
+                        <a:t>RWR</a:t>
                       </a:r>
                     </a:p>
                   </a:txBody>
@@ -46771,8 +46658,31 @@
                     </a:solidFill>
                   </a:tcPr>
                 </a:tc>
+                <a:tc>
+                  <a:txBody>
+                    <a:bodyPr lIns="45720" rIns="45720" tIns="18288" bIns="18288" wrap="square" anchor="ctr"/>
+                    <a:lstStyle/>
+                    <a:p>
+                      <a:pPr algn="ctr"/>
+                      <a:r>
+                        <a:rPr sz="1100" b="1">
+                          <a:solidFill>
+                            <a:srgbClr val="FFFFFF"/>
+                          </a:solidFill>
+                          <a:latin typeface="Calibri"/>
+                        </a:rPr>
+                        <a:t>REN</a:t>
+                      </a:r>
+                    </a:p>
+                  </a:txBody>
+                  <a:tcPr>
+                    <a:solidFill>
+                      <a:srgbClr val="70AD47"/>
+                    </a:solidFill>
+                  </a:tcPr>
+                </a:tc>
               </a:tr>
-              <a:tr h="320040">
+              <a:tr h="292608">
                 <a:tc>
                   <a:txBody>
                     <a:bodyPr lIns="45720" rIns="45720" tIns="18288" bIns="18288" wrap="square" anchor="ctr"/>
@@ -46786,7 +46696,7 @@
                           </a:solidFill>
                           <a:latin typeface="Calibri"/>
                         </a:rPr>
-                        <a:t>NB (new business)</a:t>
+                        <a:t>Under $1,200</a:t>
                       </a:r>
                     </a:p>
                   </a:txBody>
@@ -46809,13 +46719,107 @@
                           </a:solidFill>
                           <a:latin typeface="Calibri"/>
                         </a:rPr>
+                        <a:t>$5</a:t>
+                      </a:r>
+                    </a:p>
+                  </a:txBody>
+                  <a:tcPr>
+                    <a:solidFill>
+                      <a:srgbClr val="FFFFFF"/>
+                    </a:solidFill>
+                  </a:tcPr>
+                </a:tc>
+                <a:tc>
+                  <a:txBody>
+                    <a:bodyPr lIns="45720" rIns="45720" tIns="18288" bIns="18288" wrap="square" anchor="ctr"/>
+                    <a:lstStyle/>
+                    <a:p>
+                      <a:pPr algn="ctr"/>
+                      <a:r>
+                        <a:rPr sz="1100">
+                          <a:solidFill>
+                            <a:srgbClr val="101010"/>
+                          </a:solidFill>
+                          <a:latin typeface="Calibri"/>
+                        </a:rPr>
+                        <a:t>$2</a:t>
+                      </a:r>
+                    </a:p>
+                  </a:txBody>
+                  <a:tcPr>
+                    <a:solidFill>
+                      <a:srgbClr val="FFFFFF"/>
+                    </a:solidFill>
+                  </a:tcPr>
+                </a:tc>
+                <a:tc>
+                  <a:txBody>
+                    <a:bodyPr lIns="45720" rIns="45720" tIns="18288" bIns="18288" wrap="square" anchor="ctr"/>
+                    <a:lstStyle/>
+                    <a:p>
+                      <a:pPr algn="ctr"/>
+                      <a:r>
+                        <a:rPr sz="1100">
+                          <a:solidFill>
+                            <a:srgbClr val="101010"/>
+                          </a:solidFill>
+                          <a:latin typeface="Calibri"/>
+                        </a:rPr>
+                        <a:t>$4</a:t>
+                      </a:r>
+                    </a:p>
+                  </a:txBody>
+                  <a:tcPr>
+                    <a:solidFill>
+                      <a:srgbClr val="FFFFFF"/>
+                    </a:solidFill>
+                  </a:tcPr>
+                </a:tc>
+              </a:tr>
+              <a:tr h="292608">
+                <a:tc>
+                  <a:txBody>
+                    <a:bodyPr lIns="45720" rIns="45720" tIns="18288" bIns="18288" wrap="square" anchor="ctr"/>
+                    <a:lstStyle/>
+                    <a:p>
+                      <a:pPr algn="ctr"/>
+                      <a:r>
+                        <a:rPr sz="1100">
+                          <a:solidFill>
+                            <a:srgbClr val="101010"/>
+                          </a:solidFill>
+                          <a:latin typeface="Calibri"/>
+                        </a:rPr>
+                        <a:t>$1,200 - $1,799</a:t>
+                      </a:r>
+                    </a:p>
+                  </a:txBody>
+                  <a:tcPr>
+                    <a:solidFill>
+                      <a:srgbClr val="F2F2F2"/>
+                    </a:solidFill>
+                  </a:tcPr>
+                </a:tc>
+                <a:tc>
+                  <a:txBody>
+                    <a:bodyPr lIns="45720" rIns="45720" tIns="18288" bIns="18288" wrap="square" anchor="ctr"/>
+                    <a:lstStyle/>
+                    <a:p>
+                      <a:pPr algn="ctr"/>
+                      <a:r>
+                        <a:rPr sz="1100">
+                          <a:solidFill>
+                            <a:srgbClr val="101010"/>
+                          </a:solidFill>
+                          <a:latin typeface="Calibri"/>
+                        </a:rPr>
                         <a:t>$7</a:t>
                       </a:r>
                     </a:p>
                   </a:txBody>
                   <a:tcPr>
                     <a:solidFill>
-                      <a:srgbClr val="FFFFFF"/>
+                      <a:srgbClr val="F2F2F2"/>
                     </a:solidFill>
                   </a:tcPr>
                 </a:tc>
@@ -46832,18 +46836,41 @@
                           </a:solidFill>
                           <a:latin typeface="Calibri"/>
                         </a:rPr>
-                        <a:t>Every new policy written</a:t>
-                      </a:r>
-                    </a:p>
-                  </a:txBody>
-                  <a:tcPr>
-                    <a:solidFill>
-                      <a:srgbClr val="FFFFFF"/>
+                        <a:t>$3</a:t>
+                      </a:r>
+                    </a:p>
+                  </a:txBody>
+                  <a:tcPr>
+                    <a:solidFill>
+                      <a:srgbClr val="F2F2F2"/>
+                    </a:solidFill>
+                  </a:tcPr>
+                </a:tc>
+                <a:tc>
+                  <a:txBody>
+                    <a:bodyPr lIns="45720" rIns="45720" tIns="18288" bIns="18288" wrap="square" anchor="ctr"/>
+                    <a:lstStyle/>
+                    <a:p>
+                      <a:pPr algn="ctr"/>
+                      <a:r>
+                        <a:rPr sz="1100">
+                          <a:solidFill>
+                            <a:srgbClr val="101010"/>
+                          </a:solidFill>
+                          <a:latin typeface="Calibri"/>
+                        </a:rPr>
+                        <a:t>$6</a:t>
+                      </a:r>
+                    </a:p>
+                  </a:txBody>
+                  <a:tcPr>
+                    <a:solidFill>
+                      <a:srgbClr val="F2F2F2"/>
                     </a:solidFill>
                   </a:tcPr>
                 </a:tc>
               </a:tr>
-              <a:tr h="320040">
+              <a:tr h="292608">
                 <a:tc>
                   <a:txBody>
                     <a:bodyPr lIns="45720" rIns="45720" tIns="18288" bIns="18288" wrap="square" anchor="ctr"/>
@@ -46857,7 +46884,101 @@
                           </a:solidFill>
                           <a:latin typeface="Calibri"/>
                         </a:rPr>
-                        <a:t>RWR (rewrite)</a:t>
+                        <a:t>$1,800 - $2,499</a:t>
+                      </a:r>
+                    </a:p>
+                  </a:txBody>
+                  <a:tcPr>
+                    <a:solidFill>
+                      <a:srgbClr val="FFFFFF"/>
+                    </a:solidFill>
+                  </a:tcPr>
+                </a:tc>
+                <a:tc>
+                  <a:txBody>
+                    <a:bodyPr lIns="45720" rIns="45720" tIns="18288" bIns="18288" wrap="square" anchor="ctr"/>
+                    <a:lstStyle/>
+                    <a:p>
+                      <a:pPr algn="ctr"/>
+                      <a:r>
+                        <a:rPr sz="1100">
+                          <a:solidFill>
+                            <a:srgbClr val="101010"/>
+                          </a:solidFill>
+                          <a:latin typeface="Calibri"/>
+                        </a:rPr>
+                        <a:t>$10</a:t>
+                      </a:r>
+                    </a:p>
+                  </a:txBody>
+                  <a:tcPr>
+                    <a:solidFill>
+                      <a:srgbClr val="FFFFFF"/>
+                    </a:solidFill>
+                  </a:tcPr>
+                </a:tc>
+                <a:tc>
+                  <a:txBody>
+                    <a:bodyPr lIns="45720" rIns="45720" tIns="18288" bIns="18288" wrap="square" anchor="ctr"/>
+                    <a:lstStyle/>
+                    <a:p>
+                      <a:pPr algn="ctr"/>
+                      <a:r>
+                        <a:rPr sz="1100">
+                          <a:solidFill>
+                            <a:srgbClr val="101010"/>
+                          </a:solidFill>
+                          <a:latin typeface="Calibri"/>
+                        </a:rPr>
+                        <a:t>$4</a:t>
+                      </a:r>
+                    </a:p>
+                  </a:txBody>
+                  <a:tcPr>
+                    <a:solidFill>
+                      <a:srgbClr val="FFFFFF"/>
+                    </a:solidFill>
+                  </a:tcPr>
+                </a:tc>
+                <a:tc>
+                  <a:txBody>
+                    <a:bodyPr lIns="45720" rIns="45720" tIns="18288" bIns="18288" wrap="square" anchor="ctr"/>
+                    <a:lstStyle/>
+                    <a:p>
+                      <a:pPr algn="ctr"/>
+                      <a:r>
+                        <a:rPr sz="1100">
+                          <a:solidFill>
+                            <a:srgbClr val="101010"/>
+                          </a:solidFill>
+                          <a:latin typeface="Calibri"/>
+                        </a:rPr>
+                        <a:t>$8</a:t>
+                      </a:r>
+                    </a:p>
+                  </a:txBody>
+                  <a:tcPr>
+                    <a:solidFill>
+                      <a:srgbClr val="FFFFFF"/>
+                    </a:solidFill>
+                  </a:tcPr>
+                </a:tc>
+              </a:tr>
+              <a:tr h="292608">
+                <a:tc>
+                  <a:txBody>
+                    <a:bodyPr lIns="45720" rIns="45720" tIns="18288" bIns="18288" wrap="square" anchor="ctr"/>
+                    <a:lstStyle/>
+                    <a:p>
+                      <a:pPr algn="ctr"/>
+                      <a:r>
+                        <a:rPr sz="1100">
+                          <a:solidFill>
+                            <a:srgbClr val="101010"/>
+                          </a:solidFill>
+                          <a:latin typeface="Calibri"/>
+                        </a:rPr>
+                        <a:t>$2,500 - $2,999</a:t>
                       </a:r>
                     </a:p>
                   </a:txBody>
@@ -46880,7 +47001,7 @@
                           </a:solidFill>
                           <a:latin typeface="Calibri"/>
                         </a:rPr>
-                        <a:t>$2</a:t>
+                        <a:t>$13</a:t>
                       </a:r>
                     </a:p>
                   </a:txBody>
@@ -46903,7 +47024,7 @@
                           </a:solidFill>
                           <a:latin typeface="Calibri"/>
                         </a:rPr>
-                        <a:t>Rewrites pay but barely - they don't drive the bonus</a:t>
+                        <a:t>$4</a:t>
                       </a:r>
                     </a:p>
                   </a:txBody>
@@ -46913,8 +47034,31 @@
                     </a:solidFill>
                   </a:tcPr>
                 </a:tc>
+                <a:tc>
+                  <a:txBody>
+                    <a:bodyPr lIns="45720" rIns="45720" tIns="18288" bIns="18288" wrap="square" anchor="ctr"/>
+                    <a:lstStyle/>
+                    <a:p>
+                      <a:pPr algn="ctr"/>
+                      <a:r>
+                        <a:rPr sz="1100">
+                          <a:solidFill>
+                            <a:srgbClr val="101010"/>
+                          </a:solidFill>
+                          <a:latin typeface="Calibri"/>
+                        </a:rPr>
+                        <a:t>$10</a:t>
+                      </a:r>
+                    </a:p>
+                  </a:txBody>
+                  <a:tcPr>
+                    <a:solidFill>
+                      <a:srgbClr val="F2F2F2"/>
+                    </a:solidFill>
+                  </a:tcPr>
+                </a:tc>
               </a:tr>
-              <a:tr h="320040">
+              <a:tr h="292608">
                 <a:tc>
                   <a:txBody>
                     <a:bodyPr lIns="45720" rIns="45720" tIns="18288" bIns="18288" wrap="square" anchor="ctr"/>
@@ -46928,7 +47072,7 @@
                           </a:solidFill>
                           <a:latin typeface="Calibri"/>
                         </a:rPr>
-                        <a:t>REN (renewal)</a:t>
+                        <a:t>$3,000+</a:t>
                       </a:r>
                     </a:p>
                   </a:txBody>
@@ -46951,7 +47095,7 @@
                           </a:solidFill>
                           <a:latin typeface="Calibri"/>
                         </a:rPr>
-                        <a:t>$5</a:t>
+                        <a:t>$13+$2/$1k (max $25)</a:t>
                       </a:r>
                     </a:p>
                   </a:txBody>
@@ -46974,7 +47118,30 @@
                           </a:solidFill>
                           <a:latin typeface="Calibri"/>
                         </a:rPr>
-                        <a:t>Renewals pay per policy (this is NEW vs today)</a:t>
+                        <a:t>$4</a:t>
+                      </a:r>
+                    </a:p>
+                  </a:txBody>
+                  <a:tcPr>
+                    <a:solidFill>
+                      <a:srgbClr val="FFFFFF"/>
+                    </a:solidFill>
+                  </a:tcPr>
+                </a:tc>
+                <a:tc>
+                  <a:txBody>
+                    <a:bodyPr lIns="45720" rIns="45720" tIns="18288" bIns="18288" wrap="square" anchor="ctr"/>
+                    <a:lstStyle/>
+                    <a:p>
+                      <a:pPr algn="ctr"/>
+                      <a:r>
+                        <a:rPr sz="1100">
+                          <a:solidFill>
+                            <a:srgbClr val="101010"/>
+                          </a:solidFill>
+                          <a:latin typeface="Calibri"/>
+                        </a:rPr>
+                        <a:t>$10</a:t>
                       </a:r>
                     </a:p>
                   </a:txBody>
